--- a/playstore/playstore images.pptx
+++ b/playstore/playstore images.pptx
@@ -247,7 +247,7 @@
           <a:p>
             <a:fld id="{6C1F7FD2-4577-4653-BCD2-7861490BE36D}" type="datetimeFigureOut">
               <a:rPr lang="ko-KR" altLang="en-US" smtClean="0"/>
-              <a:t>2022-03-27</a:t>
+              <a:t>2026. 3. 20.</a:t>
             </a:fld>
             <a:endParaRPr lang="ko-KR" altLang="en-US"/>
           </a:p>
@@ -417,7 +417,7 @@
           <a:p>
             <a:fld id="{6C1F7FD2-4577-4653-BCD2-7861490BE36D}" type="datetimeFigureOut">
               <a:rPr lang="ko-KR" altLang="en-US" smtClean="0"/>
-              <a:t>2022-03-27</a:t>
+              <a:t>2026. 3. 20.</a:t>
             </a:fld>
             <a:endParaRPr lang="ko-KR" altLang="en-US"/>
           </a:p>
@@ -597,7 +597,7 @@
           <a:p>
             <a:fld id="{6C1F7FD2-4577-4653-BCD2-7861490BE36D}" type="datetimeFigureOut">
               <a:rPr lang="ko-KR" altLang="en-US" smtClean="0"/>
-              <a:t>2022-03-27</a:t>
+              <a:t>2026. 3. 20.</a:t>
             </a:fld>
             <a:endParaRPr lang="ko-KR" altLang="en-US"/>
           </a:p>
@@ -767,7 +767,7 @@
           <a:p>
             <a:fld id="{6C1F7FD2-4577-4653-BCD2-7861490BE36D}" type="datetimeFigureOut">
               <a:rPr lang="ko-KR" altLang="en-US" smtClean="0"/>
-              <a:t>2022-03-27</a:t>
+              <a:t>2026. 3. 20.</a:t>
             </a:fld>
             <a:endParaRPr lang="ko-KR" altLang="en-US"/>
           </a:p>
@@ -1011,7 +1011,7 @@
           <a:p>
             <a:fld id="{6C1F7FD2-4577-4653-BCD2-7861490BE36D}" type="datetimeFigureOut">
               <a:rPr lang="ko-KR" altLang="en-US" smtClean="0"/>
-              <a:t>2022-03-27</a:t>
+              <a:t>2026. 3. 20.</a:t>
             </a:fld>
             <a:endParaRPr lang="ko-KR" altLang="en-US"/>
           </a:p>
@@ -1243,7 +1243,7 @@
           <a:p>
             <a:fld id="{6C1F7FD2-4577-4653-BCD2-7861490BE36D}" type="datetimeFigureOut">
               <a:rPr lang="ko-KR" altLang="en-US" smtClean="0"/>
-              <a:t>2022-03-27</a:t>
+              <a:t>2026. 3. 20.</a:t>
             </a:fld>
             <a:endParaRPr lang="ko-KR" altLang="en-US"/>
           </a:p>
@@ -1610,7 +1610,7 @@
           <a:p>
             <a:fld id="{6C1F7FD2-4577-4653-BCD2-7861490BE36D}" type="datetimeFigureOut">
               <a:rPr lang="ko-KR" altLang="en-US" smtClean="0"/>
-              <a:t>2022-03-27</a:t>
+              <a:t>2026. 3. 20.</a:t>
             </a:fld>
             <a:endParaRPr lang="ko-KR" altLang="en-US"/>
           </a:p>
@@ -1728,7 +1728,7 @@
           <a:p>
             <a:fld id="{6C1F7FD2-4577-4653-BCD2-7861490BE36D}" type="datetimeFigureOut">
               <a:rPr lang="ko-KR" altLang="en-US" smtClean="0"/>
-              <a:t>2022-03-27</a:t>
+              <a:t>2026. 3. 20.</a:t>
             </a:fld>
             <a:endParaRPr lang="ko-KR" altLang="en-US"/>
           </a:p>
@@ -1823,7 +1823,7 @@
           <a:p>
             <a:fld id="{6C1F7FD2-4577-4653-BCD2-7861490BE36D}" type="datetimeFigureOut">
               <a:rPr lang="ko-KR" altLang="en-US" smtClean="0"/>
-              <a:t>2022-03-27</a:t>
+              <a:t>2026. 3. 20.</a:t>
             </a:fld>
             <a:endParaRPr lang="ko-KR" altLang="en-US"/>
           </a:p>
@@ -2100,7 +2100,7 @@
           <a:p>
             <a:fld id="{6C1F7FD2-4577-4653-BCD2-7861490BE36D}" type="datetimeFigureOut">
               <a:rPr lang="ko-KR" altLang="en-US" smtClean="0"/>
-              <a:t>2022-03-27</a:t>
+              <a:t>2026. 3. 20.</a:t>
             </a:fld>
             <a:endParaRPr lang="ko-KR" altLang="en-US"/>
           </a:p>
@@ -2357,7 +2357,7 @@
           <a:p>
             <a:fld id="{6C1F7FD2-4577-4653-BCD2-7861490BE36D}" type="datetimeFigureOut">
               <a:rPr lang="ko-KR" altLang="en-US" smtClean="0"/>
-              <a:t>2022-03-27</a:t>
+              <a:t>2026. 3. 20.</a:t>
             </a:fld>
             <a:endParaRPr lang="ko-KR" altLang="en-US"/>
           </a:p>
@@ -2570,7 +2570,7 @@
           <a:p>
             <a:fld id="{6C1F7FD2-4577-4653-BCD2-7861490BE36D}" type="datetimeFigureOut">
               <a:rPr lang="ko-KR" altLang="en-US" smtClean="0"/>
-              <a:t>2022-03-27</a:t>
+              <a:t>2026. 3. 20.</a:t>
             </a:fld>
             <a:endParaRPr lang="ko-KR" altLang="en-US"/>
           </a:p>
@@ -3024,7 +3024,7 @@
               <a:avLst/>
             </a:prstGeom>
             <a:solidFill>
-              <a:schemeClr val="bg1"/>
+              <a:srgbClr val="F8FBF1"/>
             </a:solidFill>
             <a:ln>
               <a:noFill/>
@@ -3077,72 +3077,19 @@
                 </a:ext>
               </a:extLst>
             </a:blip>
-            <a:stretch>
-              <a:fillRect/>
-            </a:stretch>
+            <a:srcRect/>
+            <a:stretch/>
           </p:blipFill>
           <p:spPr>
             <a:xfrm>
-              <a:off x="2105859" y="5920740"/>
-              <a:ext cx="6143861" cy="12390120"/>
+              <a:off x="2105859" y="6131224"/>
+              <a:ext cx="6143861" cy="12156776"/>
             </a:xfrm>
             <a:prstGeom prst="rect">
               <a:avLst/>
             </a:prstGeom>
           </p:spPr>
         </p:pic>
-        <p:sp>
-          <p:nvSpPr>
-            <p:cNvPr id="7" name="직사각형 6">
-              <a:extLst>
-                <a:ext uri="{FF2B5EF4-FFF2-40B4-BE49-F238E27FC236}">
-                  <a16:creationId xmlns:a16="http://schemas.microsoft.com/office/drawing/2014/main" id="{002E3625-B1BD-4E5B-9780-44226FD43110}"/>
-                </a:ext>
-              </a:extLst>
-            </p:cNvPr>
-            <p:cNvSpPr/>
-            <p:nvPr/>
-          </p:nvSpPr>
-          <p:spPr>
-            <a:xfrm>
-              <a:off x="2105859" y="5920740"/>
-              <a:ext cx="6143861" cy="45719"/>
-            </a:xfrm>
-            <a:prstGeom prst="rect">
-              <a:avLst/>
-            </a:prstGeom>
-            <a:solidFill>
-              <a:schemeClr val="bg1"/>
-            </a:solidFill>
-            <a:ln>
-              <a:noFill/>
-            </a:ln>
-          </p:spPr>
-          <p:style>
-            <a:lnRef idx="2">
-              <a:schemeClr val="accent1">
-                <a:shade val="50000"/>
-              </a:schemeClr>
-            </a:lnRef>
-            <a:fillRef idx="1">
-              <a:schemeClr val="accent1"/>
-            </a:fillRef>
-            <a:effectRef idx="0">
-              <a:schemeClr val="accent1"/>
-            </a:effectRef>
-            <a:fontRef idx="minor">
-              <a:schemeClr val="lt1"/>
-            </a:fontRef>
-          </p:style>
-          <p:txBody>
-            <a:bodyPr rtlCol="0" anchor="ctr"/>
-            <a:lstStyle/>
-            <a:p>
-              <a:pPr algn="ctr"/>
-              <a:endParaRPr lang="ko-KR" altLang="en-US"/>
-            </a:p>
-          </p:txBody>
-        </p:sp>
       </p:grpSp>
       <p:sp>
         <p:nvSpPr>
@@ -3178,8 +3125,8 @@
                 <a:solidFill>
                   <a:schemeClr val="bg1"/>
                 </a:solidFill>
-                <a:latin typeface="+mj-ea"/>
-                <a:ea typeface="+mj-ea"/>
+                <a:latin typeface="BM HANNA Air OTF" panose="020B0600000101010101" pitchFamily="34" charset="-127"/>
+                <a:ea typeface="BM HANNA Air OTF" panose="020B0600000101010101" pitchFamily="34" charset="-127"/>
               </a:rPr>
               <a:t>내 식물을 관리해보세요</a:t>
             </a:r>
@@ -3187,8 +3134,8 @@
               <a:solidFill>
                 <a:schemeClr val="bg1"/>
               </a:solidFill>
-              <a:latin typeface="+mj-ea"/>
-              <a:ea typeface="+mj-ea"/>
+              <a:latin typeface="BM HANNA Air OTF" panose="020B0600000101010101" pitchFamily="34" charset="-127"/>
+              <a:ea typeface="BM HANNA Air OTF" panose="020B0600000101010101" pitchFamily="34" charset="-127"/>
             </a:endParaRPr>
           </a:p>
           <a:p>
@@ -3208,8 +3155,8 @@
                 <a:solidFill>
                   <a:schemeClr val="bg1"/>
                 </a:solidFill>
-                <a:latin typeface="HY헤드라인M" panose="02030600000101010101" pitchFamily="18" charset="-127"/>
-                <a:ea typeface="HY헤드라인M" panose="02030600000101010101" pitchFamily="18" charset="-127"/>
+                <a:latin typeface="BM DoHyeon OTF" panose="020B0600000101010101" pitchFamily="34" charset="-127"/>
+                <a:ea typeface="BM DoHyeon OTF" panose="020B0600000101010101" pitchFamily="34" charset="-127"/>
               </a:rPr>
               <a:t>텃밭일기</a:t>
             </a:r>
@@ -3217,12 +3164,48 @@
               <a:solidFill>
                 <a:schemeClr val="bg1"/>
               </a:solidFill>
-              <a:latin typeface="HY헤드라인M" panose="02030600000101010101" pitchFamily="18" charset="-127"/>
-              <a:ea typeface="HY헤드라인M" panose="02030600000101010101" pitchFamily="18" charset="-127"/>
+              <a:latin typeface="BM DoHyeon OTF" panose="020B0600000101010101" pitchFamily="34" charset="-127"/>
+              <a:ea typeface="BM DoHyeon OTF" panose="020B0600000101010101" pitchFamily="34" charset="-127"/>
             </a:endParaRPr>
           </a:p>
         </p:txBody>
       </p:sp>
+      <p:pic>
+        <p:nvPicPr>
+          <p:cNvPr id="2" name="그림 1">
+            <a:extLst>
+              <a:ext uri="{FF2B5EF4-FFF2-40B4-BE49-F238E27FC236}">
+                <a16:creationId xmlns:a16="http://schemas.microsoft.com/office/drawing/2014/main" id="{EB02A220-DDB1-D465-A33C-0B4F232BB571}"/>
+              </a:ext>
+            </a:extLst>
+          </p:cNvPr>
+          <p:cNvPicPr>
+            <a:picLocks noChangeAspect="1"/>
+          </p:cNvPicPr>
+          <p:nvPr/>
+        </p:nvPicPr>
+        <p:blipFill>
+          <a:blip r:embed="rId3">
+            <a:extLst>
+              <a:ext uri="{28A0092B-C50C-407E-A947-70E740481C1C}">
+                <a14:useLocalDpi xmlns:a14="http://schemas.microsoft.com/office/drawing/2010/main" val="0"/>
+              </a:ext>
+            </a:extLst>
+          </a:blip>
+          <a:stretch>
+            <a:fillRect/>
+          </a:stretch>
+        </p:blipFill>
+        <p:spPr>
+          <a:xfrm>
+            <a:off x="5952446" y="1794932"/>
+            <a:ext cx="2028822" cy="2028822"/>
+          </a:xfrm>
+          <a:prstGeom prst="rect">
+            <a:avLst/>
+          </a:prstGeom>
+        </p:spPr>
+      </p:pic>
     </p:spTree>
     <p:extLst>
       <p:ext uri="{BB962C8B-B14F-4D97-AF65-F5344CB8AC3E}">
@@ -3302,7 +3285,7 @@
               <a:avLst/>
             </a:prstGeom>
             <a:solidFill>
-              <a:schemeClr val="bg1"/>
+              <a:srgbClr val="F8FBF1"/>
             </a:solidFill>
             <a:ln>
               <a:noFill/>
@@ -3360,66 +3343,14 @@
           </p:blipFill>
           <p:spPr>
             <a:xfrm>
-              <a:off x="2105859" y="5923562"/>
-              <a:ext cx="6143861" cy="12384475"/>
+              <a:off x="2105859" y="6131224"/>
+              <a:ext cx="6143861" cy="12156776"/>
             </a:xfrm>
             <a:prstGeom prst="rect">
               <a:avLst/>
             </a:prstGeom>
           </p:spPr>
         </p:pic>
-        <p:sp>
-          <p:nvSpPr>
-            <p:cNvPr id="5" name="직사각형 4">
-              <a:extLst>
-                <a:ext uri="{FF2B5EF4-FFF2-40B4-BE49-F238E27FC236}">
-                  <a16:creationId xmlns:a16="http://schemas.microsoft.com/office/drawing/2014/main" id="{AA19D60F-4D2B-479D-A5E3-76E5D5379B97}"/>
-                </a:ext>
-              </a:extLst>
-            </p:cNvPr>
-            <p:cNvSpPr/>
-            <p:nvPr/>
-          </p:nvSpPr>
-          <p:spPr>
-            <a:xfrm>
-              <a:off x="2105859" y="5920740"/>
-              <a:ext cx="6143861" cy="45719"/>
-            </a:xfrm>
-            <a:prstGeom prst="rect">
-              <a:avLst/>
-            </a:prstGeom>
-            <a:solidFill>
-              <a:schemeClr val="bg1"/>
-            </a:solidFill>
-            <a:ln>
-              <a:noFill/>
-            </a:ln>
-          </p:spPr>
-          <p:style>
-            <a:lnRef idx="2">
-              <a:schemeClr val="accent1">
-                <a:shade val="50000"/>
-              </a:schemeClr>
-            </a:lnRef>
-            <a:fillRef idx="1">
-              <a:schemeClr val="accent1"/>
-            </a:fillRef>
-            <a:effectRef idx="0">
-              <a:schemeClr val="accent1"/>
-            </a:effectRef>
-            <a:fontRef idx="minor">
-              <a:schemeClr val="lt1"/>
-            </a:fontRef>
-          </p:style>
-          <p:txBody>
-            <a:bodyPr rtlCol="0" anchor="ctr"/>
-            <a:lstStyle/>
-            <a:p>
-              <a:pPr algn="ctr"/>
-              <a:endParaRPr lang="ko-KR" altLang="en-US"/>
-            </a:p>
-          </p:txBody>
-        </p:sp>
       </p:grpSp>
       <p:sp>
         <p:nvSpPr>
@@ -3436,7 +3367,7 @@
         <p:spPr>
           <a:xfrm>
             <a:off x="1245870" y="1909142"/>
-            <a:ext cx="7795260" cy="2431435"/>
+            <a:ext cx="7795260" cy="2554545"/>
           </a:xfrm>
           <a:prstGeom prst="rect">
             <a:avLst/>
@@ -3455,8 +3386,8 @@
                 <a:solidFill>
                   <a:schemeClr val="bg1"/>
                 </a:solidFill>
-                <a:latin typeface="HY헤드라인M" panose="02030600000101010101" pitchFamily="18" charset="-127"/>
-                <a:ea typeface="HY헤드라인M" panose="02030600000101010101" pitchFamily="18" charset="-127"/>
+                <a:latin typeface="BM JUA OTF" panose="02020603020101020101" pitchFamily="18" charset="-127"/>
+                <a:ea typeface="BM JUA OTF" panose="02020603020101020101" pitchFamily="18" charset="-127"/>
               </a:rPr>
               <a:t>물주기 알림</a:t>
             </a:r>
@@ -3464,8 +3395,8 @@
               <a:solidFill>
                 <a:schemeClr val="bg1"/>
               </a:solidFill>
-              <a:latin typeface="HY헤드라인M" panose="02030600000101010101" pitchFamily="18" charset="-127"/>
-              <a:ea typeface="HY헤드라인M" panose="02030600000101010101" pitchFamily="18" charset="-127"/>
+              <a:latin typeface="BM JUA OTF" panose="02020603020101020101" pitchFamily="18" charset="-127"/>
+              <a:ea typeface="BM JUA OTF" panose="02020603020101020101" pitchFamily="18" charset="-127"/>
             </a:endParaRPr>
           </a:p>
           <a:p>
@@ -3481,19 +3412,21 @@
           <a:p>
             <a:pPr algn="ctr"/>
             <a:r>
-              <a:rPr lang="ko-KR" altLang="en-US" sz="3200" dirty="0">
+              <a:rPr lang="ko-KR" altLang="en-US" sz="4000" dirty="0">
                 <a:solidFill>
                   <a:schemeClr val="bg1"/>
                 </a:solidFill>
-                <a:latin typeface="+mn-ea"/>
+                <a:latin typeface="BM HANNA Air OTF" panose="020B0600000101010101" pitchFamily="34" charset="-127"/>
+                <a:ea typeface="BM HANNA Air OTF" panose="020B0600000101010101" pitchFamily="34" charset="-127"/>
               </a:rPr>
               <a:t>주기를 설정하고 알림을 받아보세요</a:t>
             </a:r>
-            <a:endParaRPr lang="en-US" altLang="ko-KR" sz="3200" dirty="0">
+            <a:endParaRPr lang="en-US" altLang="ko-KR" sz="4000" dirty="0">
               <a:solidFill>
                 <a:schemeClr val="bg1"/>
               </a:solidFill>
-              <a:latin typeface="+mn-ea"/>
+              <a:latin typeface="BM HANNA Air OTF" panose="020B0600000101010101" pitchFamily="34" charset="-127"/>
+              <a:ea typeface="BM HANNA Air OTF" panose="020B0600000101010101" pitchFamily="34" charset="-127"/>
             </a:endParaRPr>
           </a:p>
         </p:txBody>
@@ -3536,41 +3469,6 @@
           <a:chExt cx="0" cy="0"/>
         </a:xfrm>
       </p:grpSpPr>
-      <p:pic>
-        <p:nvPicPr>
-          <p:cNvPr id="4" name="그림 3">
-            <a:extLst>
-              <a:ext uri="{FF2B5EF4-FFF2-40B4-BE49-F238E27FC236}">
-                <a16:creationId xmlns:a16="http://schemas.microsoft.com/office/drawing/2014/main" id="{8AA3A585-8B0F-4008-8B95-3E14180E0E34}"/>
-              </a:ext>
-            </a:extLst>
-          </p:cNvPr>
-          <p:cNvPicPr>
-            <a:picLocks noChangeAspect="1"/>
-          </p:cNvPicPr>
-          <p:nvPr/>
-        </p:nvPicPr>
-        <p:blipFill>
-          <a:blip r:embed="rId2">
-            <a:extLst>
-              <a:ext uri="{28A0092B-C50C-407E-A947-70E740481C1C}">
-                <a14:useLocalDpi xmlns:a14="http://schemas.microsoft.com/office/drawing/2010/main" val="0"/>
-              </a:ext>
-            </a:extLst>
-          </a:blip>
-          <a:srcRect/>
-          <a:stretch/>
-        </p:blipFill>
-        <p:spPr>
-          <a:xfrm>
-            <a:off x="1904806" y="5507665"/>
-            <a:ext cx="6477387" cy="13056781"/>
-          </a:xfrm>
-          <a:prstGeom prst="rect">
-            <a:avLst/>
-          </a:prstGeom>
-        </p:spPr>
-      </p:pic>
       <p:sp>
         <p:nvSpPr>
           <p:cNvPr id="9" name="달 8">
@@ -3694,7 +3592,7 @@
         <p:spPr>
           <a:xfrm>
             <a:off x="1245870" y="1909142"/>
-            <a:ext cx="7795260" cy="2431435"/>
+            <a:ext cx="7795260" cy="2554545"/>
           </a:xfrm>
           <a:prstGeom prst="rect">
             <a:avLst/>
@@ -3713,8 +3611,8 @@
                 <a:solidFill>
                   <a:schemeClr val="bg1"/>
                 </a:solidFill>
-                <a:latin typeface="HY헤드라인M" panose="02030600000101010101" pitchFamily="18" charset="-127"/>
-                <a:ea typeface="HY헤드라인M" panose="02030600000101010101" pitchFamily="18" charset="-127"/>
+                <a:latin typeface="BM JUA OTF" panose="02020603020101020101" pitchFamily="18" charset="-127"/>
+                <a:ea typeface="BM JUA OTF" panose="02020603020101020101" pitchFamily="18" charset="-127"/>
               </a:rPr>
               <a:t>식물 상세페이지</a:t>
             </a:r>
@@ -3722,8 +3620,8 @@
               <a:solidFill>
                 <a:schemeClr val="bg1"/>
               </a:solidFill>
-              <a:latin typeface="HY헤드라인M" panose="02030600000101010101" pitchFamily="18" charset="-127"/>
-              <a:ea typeface="HY헤드라인M" panose="02030600000101010101" pitchFamily="18" charset="-127"/>
+              <a:latin typeface="BM JUA OTF" panose="02020603020101020101" pitchFamily="18" charset="-127"/>
+              <a:ea typeface="BM JUA OTF" panose="02020603020101020101" pitchFamily="18" charset="-127"/>
             </a:endParaRPr>
           </a:p>
           <a:p>
@@ -3739,23 +3637,133 @@
           <a:p>
             <a:pPr algn="ctr"/>
             <a:r>
-              <a:rPr lang="ko-KR" altLang="en-US" sz="3200" dirty="0">
+              <a:rPr lang="ko-KR" altLang="en-US" sz="4000" dirty="0">
                 <a:solidFill>
                   <a:schemeClr val="bg1"/>
                 </a:solidFill>
-                <a:latin typeface="+mn-ea"/>
+                <a:latin typeface="BM HANNA Air OTF" panose="020B0600000101010101" pitchFamily="34" charset="-127"/>
+                <a:ea typeface="BM HANNA Air OTF" panose="020B0600000101010101" pitchFamily="34" charset="-127"/>
               </a:rPr>
               <a:t>식물을 등록하고 텃밭을 가꿔보세요</a:t>
             </a:r>
-            <a:endParaRPr lang="en-US" altLang="ko-KR" sz="3200" dirty="0">
+            <a:endParaRPr lang="en-US" altLang="ko-KR" sz="4000" dirty="0">
               <a:solidFill>
                 <a:schemeClr val="bg1"/>
               </a:solidFill>
-              <a:latin typeface="+mn-ea"/>
+              <a:latin typeface="BM HANNA Air OTF" panose="020B0600000101010101" pitchFamily="34" charset="-127"/>
+              <a:ea typeface="BM HANNA Air OTF" panose="020B0600000101010101" pitchFamily="34" charset="-127"/>
             </a:endParaRPr>
           </a:p>
         </p:txBody>
       </p:sp>
+      <p:grpSp>
+        <p:nvGrpSpPr>
+          <p:cNvPr id="3" name="그룹 2">
+            <a:extLst>
+              <a:ext uri="{FF2B5EF4-FFF2-40B4-BE49-F238E27FC236}">
+                <a16:creationId xmlns:a16="http://schemas.microsoft.com/office/drawing/2014/main" id="{34AC4711-2002-EFD0-4A34-437998FF63E6}"/>
+              </a:ext>
+            </a:extLst>
+          </p:cNvPr>
+          <p:cNvGrpSpPr/>
+          <p:nvPr/>
+        </p:nvGrpSpPr>
+        <p:grpSpPr>
+          <a:xfrm>
+            <a:off x="1794510" y="5509260"/>
+            <a:ext cx="6697980" cy="13967460"/>
+            <a:chOff x="1794510" y="5509260"/>
+            <a:chExt cx="6697980" cy="13967460"/>
+          </a:xfrm>
+        </p:grpSpPr>
+        <p:sp>
+          <p:nvSpPr>
+            <p:cNvPr id="5" name="사각형: 둥근 모서리 2">
+              <a:extLst>
+                <a:ext uri="{FF2B5EF4-FFF2-40B4-BE49-F238E27FC236}">
+                  <a16:creationId xmlns:a16="http://schemas.microsoft.com/office/drawing/2014/main" id="{B9F75C37-C1A4-0E70-AC01-F708806C4B63}"/>
+                </a:ext>
+              </a:extLst>
+            </p:cNvPr>
+            <p:cNvSpPr/>
+            <p:nvPr/>
+          </p:nvSpPr>
+          <p:spPr>
+            <a:xfrm>
+              <a:off x="1794510" y="5509260"/>
+              <a:ext cx="6697980" cy="13967460"/>
+            </a:xfrm>
+            <a:prstGeom prst="roundRect">
+              <a:avLst/>
+            </a:prstGeom>
+            <a:solidFill>
+              <a:srgbClr val="F8FBF1"/>
+            </a:solidFill>
+            <a:ln>
+              <a:noFill/>
+            </a:ln>
+          </p:spPr>
+          <p:style>
+            <a:lnRef idx="2">
+              <a:schemeClr val="accent1">
+                <a:shade val="50000"/>
+              </a:schemeClr>
+            </a:lnRef>
+            <a:fillRef idx="1">
+              <a:schemeClr val="accent1"/>
+            </a:fillRef>
+            <a:effectRef idx="0">
+              <a:schemeClr val="accent1"/>
+            </a:effectRef>
+            <a:fontRef idx="minor">
+              <a:schemeClr val="lt1"/>
+            </a:fontRef>
+          </p:style>
+          <p:txBody>
+            <a:bodyPr rtlCol="0" anchor="ctr"/>
+            <a:lstStyle/>
+            <a:p>
+              <a:pPr algn="ctr"/>
+              <a:endParaRPr lang="ko-KR" altLang="en-US"/>
+            </a:p>
+          </p:txBody>
+        </p:sp>
+        <p:pic>
+          <p:nvPicPr>
+            <p:cNvPr id="6" name="그림 5">
+              <a:extLst>
+                <a:ext uri="{FF2B5EF4-FFF2-40B4-BE49-F238E27FC236}">
+                  <a16:creationId xmlns:a16="http://schemas.microsoft.com/office/drawing/2014/main" id="{14A18BA7-B63F-3402-0AFA-E51EFDD017E9}"/>
+                </a:ext>
+              </a:extLst>
+            </p:cNvPr>
+            <p:cNvPicPr>
+              <a:picLocks noChangeAspect="1"/>
+            </p:cNvPicPr>
+            <p:nvPr/>
+          </p:nvPicPr>
+          <p:blipFill>
+            <a:blip r:embed="rId2">
+              <a:extLst>
+                <a:ext uri="{28A0092B-C50C-407E-A947-70E740481C1C}">
+                  <a14:useLocalDpi xmlns:a14="http://schemas.microsoft.com/office/drawing/2010/main" val="0"/>
+                </a:ext>
+              </a:extLst>
+            </a:blip>
+            <a:srcRect/>
+            <a:stretch/>
+          </p:blipFill>
+          <p:spPr>
+            <a:xfrm>
+              <a:off x="2105859" y="6061166"/>
+              <a:ext cx="6143860" cy="12226834"/>
+            </a:xfrm>
+            <a:prstGeom prst="rect">
+              <a:avLst/>
+            </a:prstGeom>
+          </p:spPr>
+        </p:pic>
+      </p:grpSp>
     </p:spTree>
     <p:extLst>
       <p:ext uri="{BB962C8B-B14F-4D97-AF65-F5344CB8AC3E}">
@@ -3835,7 +3843,7 @@
               <a:avLst/>
             </a:prstGeom>
             <a:solidFill>
-              <a:schemeClr val="bg1"/>
+              <a:srgbClr val="F8FBF1"/>
             </a:solidFill>
             <a:ln>
               <a:noFill/>
@@ -3893,66 +3901,14 @@
           </p:blipFill>
           <p:spPr>
             <a:xfrm>
-              <a:off x="2105859" y="5923562"/>
-              <a:ext cx="6143860" cy="12384475"/>
+              <a:off x="2105859" y="6131225"/>
+              <a:ext cx="6143860" cy="12156775"/>
             </a:xfrm>
             <a:prstGeom prst="rect">
               <a:avLst/>
             </a:prstGeom>
           </p:spPr>
         </p:pic>
-        <p:sp>
-          <p:nvSpPr>
-            <p:cNvPr id="5" name="직사각형 4">
-              <a:extLst>
-                <a:ext uri="{FF2B5EF4-FFF2-40B4-BE49-F238E27FC236}">
-                  <a16:creationId xmlns:a16="http://schemas.microsoft.com/office/drawing/2014/main" id="{AA19D60F-4D2B-479D-A5E3-76E5D5379B97}"/>
-                </a:ext>
-              </a:extLst>
-            </p:cNvPr>
-            <p:cNvSpPr/>
-            <p:nvPr/>
-          </p:nvSpPr>
-          <p:spPr>
-            <a:xfrm>
-              <a:off x="2105859" y="5920740"/>
-              <a:ext cx="6143861" cy="45719"/>
-            </a:xfrm>
-            <a:prstGeom prst="rect">
-              <a:avLst/>
-            </a:prstGeom>
-            <a:solidFill>
-              <a:schemeClr val="bg1"/>
-            </a:solidFill>
-            <a:ln>
-              <a:noFill/>
-            </a:ln>
-          </p:spPr>
-          <p:style>
-            <a:lnRef idx="2">
-              <a:schemeClr val="accent1">
-                <a:shade val="50000"/>
-              </a:schemeClr>
-            </a:lnRef>
-            <a:fillRef idx="1">
-              <a:schemeClr val="accent1"/>
-            </a:fillRef>
-            <a:effectRef idx="0">
-              <a:schemeClr val="accent1"/>
-            </a:effectRef>
-            <a:fontRef idx="minor">
-              <a:schemeClr val="lt1"/>
-            </a:fontRef>
-          </p:style>
-          <p:txBody>
-            <a:bodyPr rtlCol="0" anchor="ctr"/>
-            <a:lstStyle/>
-            <a:p>
-              <a:pPr algn="ctr"/>
-              <a:endParaRPr lang="ko-KR" altLang="en-US"/>
-            </a:p>
-          </p:txBody>
-        </p:sp>
       </p:grpSp>
       <p:sp>
         <p:nvSpPr>
@@ -3969,7 +3925,7 @@
         <p:spPr>
           <a:xfrm>
             <a:off x="1245870" y="1909142"/>
-            <a:ext cx="7795260" cy="2923877"/>
+            <a:ext cx="7795260" cy="3170099"/>
           </a:xfrm>
           <a:prstGeom prst="rect">
             <a:avLst/>
@@ -3988,8 +3944,8 @@
                 <a:solidFill>
                   <a:schemeClr val="bg1"/>
                 </a:solidFill>
-                <a:latin typeface="HY헤드라인M" panose="02030600000101010101" pitchFamily="18" charset="-127"/>
-                <a:ea typeface="HY헤드라인M" panose="02030600000101010101" pitchFamily="18" charset="-127"/>
+                <a:latin typeface="BM JUA OTF" panose="02020603020101020101" pitchFamily="18" charset="-127"/>
+                <a:ea typeface="BM JUA OTF" panose="02020603020101020101" pitchFamily="18" charset="-127"/>
               </a:rPr>
               <a:t>식물 일기</a:t>
             </a:r>
@@ -3997,8 +3953,8 @@
               <a:solidFill>
                 <a:schemeClr val="bg1"/>
               </a:solidFill>
-              <a:latin typeface="HY헤드라인M" panose="02030600000101010101" pitchFamily="18" charset="-127"/>
-              <a:ea typeface="HY헤드라인M" panose="02030600000101010101" pitchFamily="18" charset="-127"/>
+              <a:latin typeface="BM JUA OTF" panose="02020603020101020101" pitchFamily="18" charset="-127"/>
+              <a:ea typeface="BM JUA OTF" panose="02020603020101020101" pitchFamily="18" charset="-127"/>
             </a:endParaRPr>
           </a:p>
           <a:p>
@@ -4014,37 +3970,41 @@
           <a:p>
             <a:pPr algn="ctr"/>
             <a:r>
-              <a:rPr lang="ko-KR" altLang="en-US" sz="3200" dirty="0">
+              <a:rPr lang="ko-KR" altLang="en-US" sz="4000" dirty="0">
                 <a:solidFill>
                   <a:schemeClr val="bg1"/>
                 </a:solidFill>
-                <a:latin typeface="+mn-ea"/>
+                <a:latin typeface="BM HANNA Air OTF" panose="020B0600000101010101" pitchFamily="34" charset="-127"/>
+                <a:ea typeface="BM HANNA Air OTF" panose="020B0600000101010101" pitchFamily="34" charset="-127"/>
               </a:rPr>
               <a:t>사진 및 메모로 </a:t>
+            </a:r>
+            <a:endParaRPr lang="en-US" altLang="ko-KR" sz="4000" dirty="0">
+              <a:solidFill>
+                <a:schemeClr val="bg1"/>
+              </a:solidFill>
+              <a:latin typeface="BM HANNA Air OTF" panose="020B0600000101010101" pitchFamily="34" charset="-127"/>
+              <a:ea typeface="BM HANNA Air OTF" panose="020B0600000101010101" pitchFamily="34" charset="-127"/>
+            </a:endParaRPr>
+          </a:p>
+          <a:p>
+            <a:pPr algn="ctr"/>
+            <a:r>
+              <a:rPr lang="ko-KR" altLang="en-US" sz="4000" dirty="0">
+                <a:solidFill>
+                  <a:schemeClr val="bg1"/>
+                </a:solidFill>
+                <a:latin typeface="BM HANNA Air OTF" panose="020B0600000101010101" pitchFamily="34" charset="-127"/>
+                <a:ea typeface="BM HANNA Air OTF" panose="020B0600000101010101" pitchFamily="34" charset="-127"/>
+              </a:rPr>
+              <a:t>가꾸기 기록을 남겨보세요</a:t>
             </a:r>
             <a:endParaRPr lang="en-US" altLang="ko-KR" sz="3200" dirty="0">
               <a:solidFill>
                 <a:schemeClr val="bg1"/>
               </a:solidFill>
-              <a:latin typeface="+mn-ea"/>
-            </a:endParaRPr>
-          </a:p>
-          <a:p>
-            <a:pPr algn="ctr"/>
-            <a:r>
-              <a:rPr lang="ko-KR" altLang="en-US" sz="3200" dirty="0">
-                <a:solidFill>
-                  <a:schemeClr val="bg1"/>
-                </a:solidFill>
-                <a:latin typeface="+mn-ea"/>
-              </a:rPr>
-              <a:t>가꾸기 기록을 남겨보세요</a:t>
-            </a:r>
-            <a:endParaRPr lang="en-US" altLang="ko-KR" sz="3200" dirty="0">
-              <a:solidFill>
-                <a:schemeClr val="bg1"/>
-              </a:solidFill>
-              <a:latin typeface="+mn-ea"/>
+              <a:latin typeface="BM HANNA Air OTF" panose="020B0600000101010101" pitchFamily="34" charset="-127"/>
+              <a:ea typeface="BM HANNA Air OTF" panose="020B0600000101010101" pitchFamily="34" charset="-127"/>
             </a:endParaRPr>
           </a:p>
         </p:txBody>
@@ -4128,7 +4088,7 @@
               <a:avLst/>
             </a:prstGeom>
             <a:solidFill>
-              <a:schemeClr val="bg1"/>
+              <a:srgbClr val="F8FBF1"/>
             </a:solidFill>
             <a:ln>
               <a:noFill/>
@@ -4186,66 +4146,14 @@
           </p:blipFill>
           <p:spPr>
             <a:xfrm>
-              <a:off x="2105859" y="5923563"/>
-              <a:ext cx="6143860" cy="12384473"/>
+              <a:off x="2105859" y="6131225"/>
+              <a:ext cx="6143860" cy="12156775"/>
             </a:xfrm>
             <a:prstGeom prst="rect">
               <a:avLst/>
             </a:prstGeom>
           </p:spPr>
         </p:pic>
-        <p:sp>
-          <p:nvSpPr>
-            <p:cNvPr id="5" name="직사각형 4">
-              <a:extLst>
-                <a:ext uri="{FF2B5EF4-FFF2-40B4-BE49-F238E27FC236}">
-                  <a16:creationId xmlns:a16="http://schemas.microsoft.com/office/drawing/2014/main" id="{AA19D60F-4D2B-479D-A5E3-76E5D5379B97}"/>
-                </a:ext>
-              </a:extLst>
-            </p:cNvPr>
-            <p:cNvSpPr/>
-            <p:nvPr/>
-          </p:nvSpPr>
-          <p:spPr>
-            <a:xfrm>
-              <a:off x="2105859" y="5920740"/>
-              <a:ext cx="6143861" cy="45719"/>
-            </a:xfrm>
-            <a:prstGeom prst="rect">
-              <a:avLst/>
-            </a:prstGeom>
-            <a:solidFill>
-              <a:schemeClr val="bg1"/>
-            </a:solidFill>
-            <a:ln>
-              <a:noFill/>
-            </a:ln>
-          </p:spPr>
-          <p:style>
-            <a:lnRef idx="2">
-              <a:schemeClr val="accent1">
-                <a:shade val="50000"/>
-              </a:schemeClr>
-            </a:lnRef>
-            <a:fillRef idx="1">
-              <a:schemeClr val="accent1"/>
-            </a:fillRef>
-            <a:effectRef idx="0">
-              <a:schemeClr val="accent1"/>
-            </a:effectRef>
-            <a:fontRef idx="minor">
-              <a:schemeClr val="lt1"/>
-            </a:fontRef>
-          </p:style>
-          <p:txBody>
-            <a:bodyPr rtlCol="0" anchor="ctr"/>
-            <a:lstStyle/>
-            <a:p>
-              <a:pPr algn="ctr"/>
-              <a:endParaRPr lang="ko-KR" altLang="en-US"/>
-            </a:p>
-          </p:txBody>
-        </p:sp>
       </p:grpSp>
       <p:sp>
         <p:nvSpPr>
@@ -4262,7 +4170,7 @@
         <p:spPr>
           <a:xfrm>
             <a:off x="1245870" y="1909142"/>
-            <a:ext cx="7795260" cy="2431435"/>
+            <a:ext cx="7795260" cy="2554545"/>
           </a:xfrm>
           <a:prstGeom prst="rect">
             <a:avLst/>
@@ -4281,8 +4189,8 @@
                 <a:solidFill>
                   <a:schemeClr val="bg1"/>
                 </a:solidFill>
-                <a:latin typeface="HY헤드라인M" panose="02030600000101010101" pitchFamily="18" charset="-127"/>
-                <a:ea typeface="HY헤드라인M" panose="02030600000101010101" pitchFamily="18" charset="-127"/>
+                <a:latin typeface="BM JUA OTF" panose="02020603020101020101" pitchFamily="18" charset="-127"/>
+                <a:ea typeface="BM JUA OTF" panose="02020603020101020101" pitchFamily="18" charset="-127"/>
               </a:rPr>
               <a:t>일기 페이지</a:t>
             </a:r>
@@ -4290,8 +4198,8 @@
               <a:solidFill>
                 <a:schemeClr val="bg1"/>
               </a:solidFill>
-              <a:latin typeface="HY헤드라인M" panose="02030600000101010101" pitchFamily="18" charset="-127"/>
-              <a:ea typeface="HY헤드라인M" panose="02030600000101010101" pitchFamily="18" charset="-127"/>
+              <a:latin typeface="BM JUA OTF" panose="02020603020101020101" pitchFamily="18" charset="-127"/>
+              <a:ea typeface="BM JUA OTF" panose="02020603020101020101" pitchFamily="18" charset="-127"/>
             </a:endParaRPr>
           </a:p>
           <a:p>
@@ -4307,19 +4215,21 @@
           <a:p>
             <a:pPr algn="ctr"/>
             <a:r>
-              <a:rPr lang="ko-KR" altLang="en-US" sz="3200" dirty="0">
+              <a:rPr lang="ko-KR" altLang="en-US" sz="4000" dirty="0">
                 <a:solidFill>
                   <a:schemeClr val="bg1"/>
                 </a:solidFill>
-                <a:latin typeface="+mn-ea"/>
+                <a:latin typeface="BM HANNA Air OTF" panose="020B0600000101010101" pitchFamily="34" charset="-127"/>
+                <a:ea typeface="BM HANNA Air OTF" panose="020B0600000101010101" pitchFamily="34" charset="-127"/>
               </a:rPr>
               <a:t>월별로 일기를 모아보세요</a:t>
             </a:r>
-            <a:endParaRPr lang="en-US" altLang="ko-KR" sz="3200" dirty="0">
+            <a:endParaRPr lang="en-US" altLang="ko-KR" sz="4000" dirty="0">
               <a:solidFill>
                 <a:schemeClr val="bg1"/>
               </a:solidFill>
-              <a:latin typeface="+mn-ea"/>
+              <a:latin typeface="BM HANNA Air OTF" panose="020B0600000101010101" pitchFamily="34" charset="-127"/>
+              <a:ea typeface="BM HANNA Air OTF" panose="020B0600000101010101" pitchFamily="34" charset="-127"/>
             </a:endParaRPr>
           </a:p>
         </p:txBody>

--- a/playstore/playstore images.pptx
+++ b/playstore/playstore images.pptx
@@ -247,7 +247,7 @@
           <a:p>
             <a:fld id="{6C1F7FD2-4577-4653-BCD2-7861490BE36D}" type="datetimeFigureOut">
               <a:rPr lang="ko-KR" altLang="en-US" smtClean="0"/>
-              <a:t>2026. 3. 20.</a:t>
+              <a:t>2026. 3. 24.</a:t>
             </a:fld>
             <a:endParaRPr lang="ko-KR" altLang="en-US"/>
           </a:p>
@@ -417,7 +417,7 @@
           <a:p>
             <a:fld id="{6C1F7FD2-4577-4653-BCD2-7861490BE36D}" type="datetimeFigureOut">
               <a:rPr lang="ko-KR" altLang="en-US" smtClean="0"/>
-              <a:t>2026. 3. 20.</a:t>
+              <a:t>2026. 3. 24.</a:t>
             </a:fld>
             <a:endParaRPr lang="ko-KR" altLang="en-US"/>
           </a:p>
@@ -597,7 +597,7 @@
           <a:p>
             <a:fld id="{6C1F7FD2-4577-4653-BCD2-7861490BE36D}" type="datetimeFigureOut">
               <a:rPr lang="ko-KR" altLang="en-US" smtClean="0"/>
-              <a:t>2026. 3. 20.</a:t>
+              <a:t>2026. 3. 24.</a:t>
             </a:fld>
             <a:endParaRPr lang="ko-KR" altLang="en-US"/>
           </a:p>
@@ -767,7 +767,7 @@
           <a:p>
             <a:fld id="{6C1F7FD2-4577-4653-BCD2-7861490BE36D}" type="datetimeFigureOut">
               <a:rPr lang="ko-KR" altLang="en-US" smtClean="0"/>
-              <a:t>2026. 3. 20.</a:t>
+              <a:t>2026. 3. 24.</a:t>
             </a:fld>
             <a:endParaRPr lang="ko-KR" altLang="en-US"/>
           </a:p>
@@ -1011,7 +1011,7 @@
           <a:p>
             <a:fld id="{6C1F7FD2-4577-4653-BCD2-7861490BE36D}" type="datetimeFigureOut">
               <a:rPr lang="ko-KR" altLang="en-US" smtClean="0"/>
-              <a:t>2026. 3. 20.</a:t>
+              <a:t>2026. 3. 24.</a:t>
             </a:fld>
             <a:endParaRPr lang="ko-KR" altLang="en-US"/>
           </a:p>
@@ -1243,7 +1243,7 @@
           <a:p>
             <a:fld id="{6C1F7FD2-4577-4653-BCD2-7861490BE36D}" type="datetimeFigureOut">
               <a:rPr lang="ko-KR" altLang="en-US" smtClean="0"/>
-              <a:t>2026. 3. 20.</a:t>
+              <a:t>2026. 3. 24.</a:t>
             </a:fld>
             <a:endParaRPr lang="ko-KR" altLang="en-US"/>
           </a:p>
@@ -1610,7 +1610,7 @@
           <a:p>
             <a:fld id="{6C1F7FD2-4577-4653-BCD2-7861490BE36D}" type="datetimeFigureOut">
               <a:rPr lang="ko-KR" altLang="en-US" smtClean="0"/>
-              <a:t>2026. 3. 20.</a:t>
+              <a:t>2026. 3. 24.</a:t>
             </a:fld>
             <a:endParaRPr lang="ko-KR" altLang="en-US"/>
           </a:p>
@@ -1728,7 +1728,7 @@
           <a:p>
             <a:fld id="{6C1F7FD2-4577-4653-BCD2-7861490BE36D}" type="datetimeFigureOut">
               <a:rPr lang="ko-KR" altLang="en-US" smtClean="0"/>
-              <a:t>2026. 3. 20.</a:t>
+              <a:t>2026. 3. 24.</a:t>
             </a:fld>
             <a:endParaRPr lang="ko-KR" altLang="en-US"/>
           </a:p>
@@ -1823,7 +1823,7 @@
           <a:p>
             <a:fld id="{6C1F7FD2-4577-4653-BCD2-7861490BE36D}" type="datetimeFigureOut">
               <a:rPr lang="ko-KR" altLang="en-US" smtClean="0"/>
-              <a:t>2026. 3. 20.</a:t>
+              <a:t>2026. 3. 24.</a:t>
             </a:fld>
             <a:endParaRPr lang="ko-KR" altLang="en-US"/>
           </a:p>
@@ -2100,7 +2100,7 @@
           <a:p>
             <a:fld id="{6C1F7FD2-4577-4653-BCD2-7861490BE36D}" type="datetimeFigureOut">
               <a:rPr lang="ko-KR" altLang="en-US" smtClean="0"/>
-              <a:t>2026. 3. 20.</a:t>
+              <a:t>2026. 3. 24.</a:t>
             </a:fld>
             <a:endParaRPr lang="ko-KR" altLang="en-US"/>
           </a:p>
@@ -2357,7 +2357,7 @@
           <a:p>
             <a:fld id="{6C1F7FD2-4577-4653-BCD2-7861490BE36D}" type="datetimeFigureOut">
               <a:rPr lang="ko-KR" altLang="en-US" smtClean="0"/>
-              <a:t>2026. 3. 20.</a:t>
+              <a:t>2026. 3. 24.</a:t>
             </a:fld>
             <a:endParaRPr lang="ko-KR" altLang="en-US"/>
           </a:p>
@@ -2570,7 +2570,7 @@
           <a:p>
             <a:fld id="{6C1F7FD2-4577-4653-BCD2-7861490BE36D}" type="datetimeFigureOut">
               <a:rPr lang="ko-KR" altLang="en-US" smtClean="0"/>
-              <a:t>2026. 3. 20.</a:t>
+              <a:t>2026. 3. 24.</a:t>
             </a:fld>
             <a:endParaRPr lang="ko-KR" altLang="en-US"/>
           </a:p>
@@ -4088,7 +4088,7 @@
               <a:avLst/>
             </a:prstGeom>
             <a:solidFill>
-              <a:srgbClr val="F8FBF1"/>
+              <a:srgbClr val="A7ABA3"/>
             </a:solidFill>
             <a:ln>
               <a:noFill/>
@@ -4146,8 +4146,8 @@
           </p:blipFill>
           <p:spPr>
             <a:xfrm>
-              <a:off x="2105859" y="6131225"/>
-              <a:ext cx="6143860" cy="12156775"/>
+              <a:off x="2105859" y="6225038"/>
+              <a:ext cx="6143860" cy="11969149"/>
             </a:xfrm>
             <a:prstGeom prst="rect">
               <a:avLst/>
@@ -4192,7 +4192,7 @@
                 <a:latin typeface="BM JUA OTF" panose="02020603020101020101" pitchFamily="18" charset="-127"/>
                 <a:ea typeface="BM JUA OTF" panose="02020603020101020101" pitchFamily="18" charset="-127"/>
               </a:rPr>
-              <a:t>일기 페이지</a:t>
+              <a:t>일기 내보내기</a:t>
             </a:r>
             <a:endParaRPr lang="en-US" altLang="ko-KR" sz="6000" dirty="0">
               <a:solidFill>
@@ -4215,6 +4215,16 @@
           <a:p>
             <a:pPr algn="ctr"/>
             <a:r>
+              <a:rPr lang="en-US" altLang="ko-KR" sz="4000" dirty="0">
+                <a:solidFill>
+                  <a:schemeClr val="bg1"/>
+                </a:solidFill>
+                <a:latin typeface="BM HANNA Air OTF" panose="020B0600000101010101" pitchFamily="34" charset="-127"/>
+                <a:ea typeface="BM HANNA Air OTF" panose="020B0600000101010101" pitchFamily="34" charset="-127"/>
+              </a:rPr>
+              <a:t>PDF</a:t>
+            </a:r>
+            <a:r>
               <a:rPr lang="ko-KR" altLang="en-US" sz="4000" dirty="0">
                 <a:solidFill>
                   <a:schemeClr val="bg1"/>
@@ -4222,7 +4232,7 @@
                 <a:latin typeface="BM HANNA Air OTF" panose="020B0600000101010101" pitchFamily="34" charset="-127"/>
                 <a:ea typeface="BM HANNA Air OTF" panose="020B0600000101010101" pitchFamily="34" charset="-127"/>
               </a:rPr>
-              <a:t>월별로 일기를 모아보세요</a:t>
+              <a:t> 파일로 일기를 내보낼 수 있어요</a:t>
             </a:r>
             <a:endParaRPr lang="en-US" altLang="ko-KR" sz="4000" dirty="0">
               <a:solidFill>
